--- a/assets/pptx/catalog-499.pptx
+++ b/assets/pptx/catalog-499.pptx
@@ -3307,7 +3307,7 @@
                 <a:ea typeface="Ebrima"/>
                 <a:cs typeface="Ebrima"/>
               </a:rPr>
-              <a:t>እንዴት እኖራለሁ እኔ ሳልተነፍስ (2x)</a:t>
+              <a:t>እንዴት እኖራለሁ እኔ ሳልተነፍስ 2x</a:t>
             </a:r>
           </a:p>
         </p:txBody>
@@ -3392,7 +3392,7 @@
                 <a:ea typeface="Ebrima"/>
                 <a:cs typeface="Ebrima"/>
               </a:rPr>
-              <a:t>ምን ዓይነት ንጉሥ ነህ (2x)</a:t>
+              <a:t>ምን ዓይነት ንጉሥ ነህ 2x</a:t>
             </a:r>
           </a:p>
         </p:txBody>
@@ -3459,7 +3459,7 @@
                 <a:ea typeface="Ebrima"/>
                 <a:cs typeface="Ebrima"/>
               </a:rPr>
-              <a:t>አምላክ ሆይ እንደ አንተ ያለ የለም (4x)</a:t>
+              <a:t>አምላክ ሆይ እንደ አንተ ያለ የለም 4x</a:t>
             </a:r>
           </a:p>
         </p:txBody>
@@ -3647,7 +3647,7 @@
                 <a:ea typeface="Ebrima"/>
                 <a:cs typeface="Ebrima"/>
               </a:rPr>
-              <a:t>እግዚአብሔር ሆይ ስለ ሥምህ አመልክሃልሁ (2x)</a:t>
+              <a:t>እግዚአብሔር ሆይ ስለ ሥምህ አመልክሃልሁ 2x</a:t>
             </a:r>
           </a:p>
           <a:p>
@@ -3665,7 +3665,7 @@
                 <a:ea typeface="Ebrima"/>
                 <a:cs typeface="Ebrima"/>
               </a:rPr>
-              <a:t>እግዚአብሔር ሆይ ስለ ራስህ አመልክሃልሁ አሃ (2x)</a:t>
+              <a:t>እግዚአብሔር ሆይ ስለ ራስህ አመልክሃልሁ አሃ 2x</a:t>
             </a:r>
           </a:p>
           <a:p>
@@ -3683,7 +3683,7 @@
                 <a:ea typeface="Ebrima"/>
                 <a:cs typeface="Ebrima"/>
               </a:rPr>
-              <a:t>እግዚአብሔር ሆይ ስለ ሥምህ አመልክሃልሁ (2x)</a:t>
+              <a:t>እግዚአብሔር ሆይ ስለ ሥምህ አመልክሃልሁ 2x</a:t>
             </a:r>
           </a:p>
           <a:p>
@@ -3701,7 +3701,7 @@
                 <a:ea typeface="Ebrima"/>
                 <a:cs typeface="Ebrima"/>
               </a:rPr>
-              <a:t>እግዚአብሔር ሆይ ስለ ራስህ አመልክሃልሁ አሃ (2x)</a:t>
+              <a:t>እግዚአብሔር ሆይ ስለ ራስህ አመልክሃልሁ አሃ 2x</a:t>
             </a:r>
           </a:p>
         </p:txBody>
@@ -3822,7 +3822,7 @@
                 <a:ea typeface="Ebrima"/>
                 <a:cs typeface="Ebrima"/>
               </a:rPr>
-              <a:t>እፎይ የምልበት እርሱ ነዉ (2x)</a:t>
+              <a:t>እፎይ የምልበት እርሱ ነዉ 2x</a:t>
             </a:r>
           </a:p>
         </p:txBody>
@@ -4010,7 +4010,7 @@
                 <a:ea typeface="Ebrima"/>
                 <a:cs typeface="Ebrima"/>
               </a:rPr>
-              <a:t>አምላክ ሆይ እንደ አንተ ያለ የለም (4x)</a:t>
+              <a:t>አምላክ ሆይ እንደ አንተ ያለ የለም 4x</a:t>
             </a:r>
           </a:p>
         </p:txBody>
@@ -4131,7 +4131,7 @@
                 <a:ea typeface="Ebrima"/>
                 <a:cs typeface="Ebrima"/>
               </a:rPr>
-              <a:t>አረጋገጥክልኝ ሌሊቱ እንዳበቃ (2x)</a:t>
+              <a:t>አረጋገጥክልኝ ሌሊቱ እንዳበቃ 2x</a:t>
             </a:r>
           </a:p>
         </p:txBody>
@@ -4216,7 +4216,7 @@
                 <a:ea typeface="Ebrima"/>
                 <a:cs typeface="Ebrima"/>
               </a:rPr>
-              <a:t>ምን ዓይነት ንጉሥ ነህ (2x)</a:t>
+              <a:t>ምን ዓይነት ንጉሥ ነህ 2x</a:t>
             </a:r>
           </a:p>
         </p:txBody>
@@ -4337,7 +4337,7 @@
                 <a:ea typeface="Ebrima"/>
                 <a:cs typeface="Ebrima"/>
               </a:rPr>
-              <a:t>እፎይ የምልበት እርሱ ነዉ (2x)</a:t>
+              <a:t>እፎይ የምልበት እርሱ ነዉ 2x</a:t>
             </a:r>
           </a:p>
         </p:txBody>
@@ -4525,7 +4525,7 @@
                 <a:ea typeface="Ebrima"/>
                 <a:cs typeface="Ebrima"/>
               </a:rPr>
-              <a:t>አምላክ ሆይ እንደ አንተ ያለ የለም (4x)</a:t>
+              <a:t>አምላክ ሆይ እንደ አንተ ያለ የለም 4x</a:t>
             </a:r>
           </a:p>
         </p:txBody>
